--- a/slides/decks/s14-car-t.pptx
+++ b/slides/decks/s14-car-t.pptx
@@ -135,19 +135,19 @@
   <p:extLst>
     <p:ext uri="{521415D9-36F7-43E2-AB2F-B90AF26B5E84}">
       <p14:sectionLst xmlns:p14="http://schemas.microsoft.com/office/powerpoint/2010/main">
-        <p14:section name="Opening" id="{49f72b17-f314-28be-c6c4-ea6ac998c0b4}">
+        <p14:section name="Opening" id="{5dafabc3-caa9-46cd-15b7-0d0f86b8fd64}">
           <p14:sldIdLst>
             <p14:sldId id="256"/>
             <p14:sldId id="257"/>
           </p14:sldIdLst>
         </p14:section>
-        <p14:section name="Engineered T cells" id="{0ab02161-823d-5b91-fcef-0e81bddccf92}">
+        <p14:section name="Engineered T cells" id="{36f3f7b8-f6ea-2249-8f5b-d9a64c0678ea}">
           <p14:sldIdLst>
             <p14:sldId id="258"/>
             <p14:sldId id="259"/>
           </p14:sldIdLst>
         </p14:section>
-        <p14:section name="CAR-T efficacy" id="{48563eed-996d-ca1b-58b0-728b4a9d1f81}">
+        <p14:section name="CAR-T efficacy" id="{aac1040b-c21d-5cb2-20a5-1d65e13946f0}">
           <p14:sldIdLst>
             <p14:sldId id="260"/>
             <p14:sldId id="261"/>
@@ -157,21 +157,21 @@
             <p14:sldId id="265"/>
           </p14:sldIdLst>
         </p14:section>
-        <p14:section name="Toxicity" id="{bd4a569d-914b-5850-7277-2202f27b489d}">
+        <p14:section name="Toxicity" id="{28aeec85-8149-cff2-a7d9-f231d1c440b5}">
           <p14:sldIdLst>
             <p14:sldId id="266"/>
             <p14:sldId id="267"/>
             <p14:sldId id="268"/>
           </p14:sldIdLst>
         </p14:section>
-        <p14:section name="Resistance and future" id="{1ee3a88c-241d-2660-4ecf-8b728f638725}">
+        <p14:section name="Resistance and future" id="{64755a8d-e5b8-1723-b2dd-52d625f4d3c2}">
           <p14:sldIdLst>
             <p14:sldId id="269"/>
             <p14:sldId id="270"/>
             <p14:sldId id="271"/>
           </p14:sldIdLst>
         </p14:section>
-        <p14:section name="Board questions" id="{c3aba5d6-a0ec-2d63-4b7f-9507b7adff78}">
+        <p14:section name="Board questions" id="{74f1bcaa-8f50-132f-1b30-67d7bb6ecefc}">
           <p14:sldIdLst>
             <p14:sldId id="272"/>
             <p14:sldId id="273"/>
@@ -181,14 +181,14 @@
             <p14:sldId id="277"/>
           </p14:sldIdLst>
         </p14:section>
-        <p14:section name="References" id="{bc827304-f0ae-f615-2493-bf0465d43bed}">
+        <p14:section name="References" id="{cee69fa7-2bfc-a64c-30f7-809d5b58b344}">
           <p14:sldIdLst>
             <p14:sldId id="278"/>
             <p14:sldId id="279"/>
             <p14:sldId id="280"/>
           </p14:sldIdLst>
         </p14:section>
-        <p14:section name="Backup" id="{0ecdecab-5c96-36e7-2bf5-4fb3cf3301da}">
+        <p14:section name="Backup" id="{aa9dcbce-84e1-0992-fa4e-4630ab1a3e84}">
           <p14:sldIdLst>
             <p14:sldId id="281"/>
             <p14:sldId id="282"/>
